--- a/assigns/06/MySolution/Presentation1.pptx
+++ b/assigns/06/MySolution/Presentation1.pptx
@@ -3468,7 +3468,7 @@
               <a:p>
                 <a:r>
                   <a:rPr lang="en-US" dirty="0"/>
-                  <a:t>Source Language</a:t>
+                  <a:t>Input</a:t>
                 </a:r>
               </a:p>
               <a:p>
